--- a/docs/ARCHITECTURE Deck.pptx
+++ b/docs/ARCHITECTURE Deck.pptx
@@ -9540,7 +9540,7 @@
                 <a:ea typeface="Calibri" pitchFamily="34" charset="-122"/>
                 <a:cs typeface="Calibri" pitchFamily="34" charset="-120"/>
               </a:rPr>
-              <a:t>Infrastructure: clusters, buckets, scopes, credentials, allowlists  ·  208 tools  ·  this repository</a:t>
+              <a:t>Infrastructure: clusters, buckets, scopes, credentials, allowlists  ·  280 tools  ·  this repository</a:t>
             </a:r>
             <a:endParaRPr lang="en-US" sz="1250" dirty="0"/>
           </a:p>
@@ -11447,7 +11447,7 @@
                 <a:ea typeface="Calibri" pitchFamily="34" charset="-122"/>
                 <a:cs typeface="Calibri" pitchFamily="34" charset="-120"/>
               </a:rPr>
-              <a:t>208 tools. Three deployment modes. One loaded set.</a:t>
+              <a:t>280 tools. Three deployment modes. One loaded set.</a:t>
             </a:r>
             <a:endParaRPr lang="en-US" sz="3300" dirty="0"/>
           </a:p>
@@ -11555,7 +11555,7 @@
                 <a:ea typeface="Calibri" pitchFamily="34" charset="-122"/>
                 <a:cs typeface="Calibri" pitchFamily="34" charset="-120"/>
               </a:rPr>
-              <a:t>134</a:t>
+              <a:t>142</a:t>
             </a:r>
             <a:endParaRPr lang="en-US" sz="5400" dirty="0"/>
           </a:p>
@@ -11636,7 +11636,7 @@
                 <a:ea typeface="Calibri" pitchFamily="34" charset="-122"/>
                 <a:cs typeface="Calibri" pitchFamily="34" charset="-120"/>
               </a:rPr>
-              <a:t>121 admin_* tools plus 13 deployment-neutral cb_* tools. No capella_* tools.</a:t>
+              <a:t>123 admin_* tools plus 19 deployment-neutral cb_* tools. No capella_* tools.</a:t>
             </a:r>
             <a:endParaRPr lang="en-US" sz="1200" dirty="0"/>
           </a:p>
@@ -11702,7 +11702,7 @@
                 <a:ea typeface="Calibri" pitchFamily="34" charset="-122"/>
                 <a:cs typeface="Calibri" pitchFamily="34" charset="-120"/>
               </a:rPr>
-              <a:t>74</a:t>
+              <a:t>158</a:t>
             </a:r>
             <a:endParaRPr lang="en-US" sz="5400" dirty="0"/>
           </a:p>
@@ -11783,7 +11783,7 @@
                 <a:ea typeface="Calibri" pitchFamily="34" charset="-122"/>
                 <a:cs typeface="Calibri" pitchFamily="34" charset="-120"/>
               </a:rPr>
-              <a:t>The capella_* family: 61 v4 primitives, 9 orchestration tools, 4 fixture tools. The shared cb_* tools load alongside.</a:t>
+              <a:t>The capella_* family: 125 v4 primitives plus 8 orchestration and 4 fixture tools. The shared cb_* tools and one allowlisted admin_* load alongside.</a:t>
             </a:r>
             <a:endParaRPr lang="en-US" sz="1200" dirty="0"/>
           </a:p>
@@ -11849,7 +11849,7 @@
                 <a:ea typeface="Calibri" pitchFamily="34" charset="-122"/>
                 <a:cs typeface="Calibri" pitchFamily="34" charset="-120"/>
               </a:rPr>
-              <a:t>208</a:t>
+              <a:t>280</a:t>
             </a:r>
             <a:endParaRPr lang="en-US" sz="5400" dirty="0"/>
           </a:p>
@@ -11972,7 +11972,7 @@
                 <a:ea typeface="Calibri" pitchFamily="34" charset="-122"/>
                 <a:cs typeface="Calibri" pitchFamily="34" charset="-120"/>
               </a:rPr>
-              <a:t>The 61 Capella primitives are generated from one registry of operation records. Only cb_* loads against both interfaces.</a:t>
+              <a:t>The 125 Capella primitives are generated from one registry of operation records. Counts measured 2026-09-14. Only cb_* loads against both interfaces.</a:t>
             </a:r>
             <a:endParaRPr lang="en-US" sz="1450" dirty="0"/>
           </a:p>

--- a/docs/ARCHITECTURE Deck.pptx
+++ b/docs/ARCHITECTURE Deck.pptx
@@ -9540,7 +9540,7 @@
                 <a:ea typeface="Calibri" pitchFamily="34" charset="-122"/>
                 <a:cs typeface="Calibri" pitchFamily="34" charset="-120"/>
               </a:rPr>
-              <a:t>Infrastructure: clusters, buckets, scopes, credentials, allowlists  ·  280 tools  ·  this repository</a:t>
+              <a:t>Infrastructure: clusters, buckets, scopes, credentials, allowlists  ·  284 tools  ·  this repository</a:t>
             </a:r>
             <a:endParaRPr lang="en-US" sz="1250" dirty="0"/>
           </a:p>
@@ -11447,7 +11447,7 @@
                 <a:ea typeface="Calibri" pitchFamily="34" charset="-122"/>
                 <a:cs typeface="Calibri" pitchFamily="34" charset="-120"/>
               </a:rPr>
-              <a:t>280 tools. Three deployment modes. One loaded set.</a:t>
+              <a:t>284 tools. Three deployment modes. One loaded set.</a:t>
             </a:r>
             <a:endParaRPr lang="en-US" sz="3300" dirty="0"/>
           </a:p>
@@ -11555,7 +11555,7 @@
                 <a:ea typeface="Calibri" pitchFamily="34" charset="-122"/>
                 <a:cs typeface="Calibri" pitchFamily="34" charset="-120"/>
               </a:rPr>
-              <a:t>142</a:t>
+              <a:t>146</a:t>
             </a:r>
             <a:endParaRPr lang="en-US" sz="5400" dirty="0"/>
           </a:p>
@@ -11636,7 +11636,7 @@
                 <a:ea typeface="Calibri" pitchFamily="34" charset="-122"/>
                 <a:cs typeface="Calibri" pitchFamily="34" charset="-120"/>
               </a:rPr>
-              <a:t>123 admin_* tools plus 19 deployment-neutral cb_* tools. No capella_* tools.</a:t>
+              <a:t>127 admin_* tools plus 19 deployment-neutral cb_* tools. No capella_* tools.</a:t>
             </a:r>
             <a:endParaRPr lang="en-US" sz="1200" dirty="0"/>
           </a:p>
@@ -11849,7 +11849,7 @@
                 <a:ea typeface="Calibri" pitchFamily="34" charset="-122"/>
                 <a:cs typeface="Calibri" pitchFamily="34" charset="-120"/>
               </a:rPr>
-              <a:t>280</a:t>
+              <a:t>284</a:t>
             </a:r>
             <a:endParaRPr lang="en-US" sz="5400" dirty="0"/>
           </a:p>
